--- a/GGN_解读.pptx
+++ b/GGN_解读.pptx
@@ -407,7 +407,19 @@
 · 表项：B4 受硬件表项限制，Tree Tunnels 把隧道和 FIB 表项减少最多 90%；SE 受 WCMP 组数限制，一次只能停一个 shard、只能为 50% 远端 edge 编程独立状态；ECMP 下观测到 6% 不均衡。
 右栏（GGN 未涉及，来自公开资料）：
 · 在途数据量 = 带宽 × RTT；光纤约 5 µs/km。800 Gbps × 1 ms = 100 MB；× 5 ms = 500 MB。深缓存芯片如 Broadcom Jericho4、Cisco Silicon One P200（HBM）。
-· 长距 RDMA：PFC 暂停信号跨 100 km 需 0.5 ms，下游需约 100 MB 余量；分段方案如 MatchRDMA（arXiv 2604.23932）。
+· 长距 RDMA：PFC 暂停信号跨 100 km 需 0.5 ms，下游需约 100 MB 余量；分段方案如 MatchRDMA（arXiv 2604.23932）。</a:t>
+            </a:r>
+            <a:r>
+              <a:rPr lang="zh-CN" altLang="en-US" dirty="0"/>
+              <a:t>基于优先级的流量控制（</a:t>
+            </a:r>
+            <a:r>
+              <a:rPr lang="en-SG" dirty="0"/>
+              <a:t>Priority-based Flow Control）</a:t>
+            </a:r>
+            <a:r>
+              <a:rPr lang="en-US" dirty="0"/>
+              <a:t>
 · 拥塞控制：NVIDIA Spectrum-XGS 的距离自适应拥塞控制；Cisco 主张利用集合通信的重复性提前调度，深缓存作安全网。
 · 光模块：Cisco（The Register，2026.10）估算 scale-across 带宽约为常规 DCI 的 14 倍，两个 100 MW 站点需 1.2~3.2 万个相干端口（常规 DCI 约 1~2 千）。</a:t>
             </a:r>
@@ -4141,8 +4153,8 @@
         </p:nvSpPr>
         <p:spPr>
           <a:xfrm>
-            <a:off x="6255868" y="5212080"/>
-            <a:ext cx="5387188" cy="960120"/>
+            <a:off x="6255868" y="5212079"/>
+            <a:ext cx="5387188" cy="1134433"/>
           </a:xfrm>
           <a:prstGeom prst="roundRect">
             <a:avLst>
@@ -4170,7 +4182,7 @@
         </p:nvSpPr>
         <p:spPr>
           <a:xfrm>
-            <a:off x="6438748" y="5413248"/>
+            <a:off x="6438748" y="5556125"/>
             <a:ext cx="457200" cy="457200"/>
           </a:xfrm>
           <a:prstGeom prst="ellipse">
@@ -4210,7 +4222,7 @@
         </p:blipFill>
         <p:spPr>
           <a:xfrm>
-            <a:off x="6539332" y="5513832"/>
+            <a:off x="6539332" y="5656709"/>
             <a:ext cx="256032" cy="256032"/>
           </a:xfrm>
           <a:prstGeom prst="rect">
@@ -4220,14 +4232,14 @@
       </p:pic>
       <p:sp>
         <p:nvSpPr>
-          <p:cNvPr id="47" name="Text 37"/>
+          <p:cNvPr id="48" name="Text 38"/>
           <p:cNvSpPr txBox="1"/>
           <p:nvPr/>
         </p:nvSpPr>
         <p:spPr>
           <a:xfrm>
-            <a:off x="7033108" y="5285232"/>
-            <a:ext cx="4427068" cy="329184"/>
+            <a:off x="7033108" y="5266366"/>
+            <a:ext cx="4427068" cy="1134433"/>
           </a:xfrm>
           <a:prstGeom prst="rect">
             <a:avLst/>
@@ -4236,57 +4248,109 @@
           <a:ln/>
         </p:spPr>
         <p:txBody>
-          <a:bodyPr wrap="square" lIns="0" tIns="0" rIns="0" bIns="0" rtlCol="0" anchor="ctr"/>
-          <a:lstStyle/>
-          <a:p>
-            <a:pPr marL="0" indent="0">
-              <a:buNone/>
-            </a:pPr>
-            <a:r>
-              <a:rPr lang="zh-CN" altLang="en-US" sz="1600" b="1" dirty="0">
-                <a:solidFill>
-                  <a:schemeClr val="tx1"/>
-                </a:solidFill>
-              </a:rPr>
-              <a:t>相干可插拔光模块</a:t>
-            </a:r>
-            <a:endParaRPr lang="zh-CN" altLang="en-US" sz="1600" dirty="0"/>
-          </a:p>
-        </p:txBody>
-      </p:sp>
-      <p:sp>
-        <p:nvSpPr>
-          <p:cNvPr id="48" name="Text 38"/>
-          <p:cNvSpPr txBox="1"/>
-          <p:nvPr/>
-        </p:nvSpPr>
-        <p:spPr>
-          <a:xfrm>
-            <a:off x="7033108" y="5623560"/>
-            <a:ext cx="4427068" cy="502920"/>
-          </a:xfrm>
-          <a:prstGeom prst="rect">
-            <a:avLst/>
-          </a:prstGeom>
-          <a:noFill/>
-          <a:ln/>
-        </p:spPr>
-        <p:txBody>
           <a:bodyPr wrap="square" lIns="0" tIns="0" rIns="0" bIns="0" rtlCol="0" anchor="t"/>
           <a:lstStyle/>
           <a:p>
-            <a:pPr marL="0" indent="0">
-              <a:buNone/>
-            </a:pPr>
-            <a:r>
-              <a:rPr lang="zh-CN" altLang="en-US" sz="1400" dirty="0">
-                <a:solidFill>
-                  <a:schemeClr val="tx1"/>
-                </a:solidFill>
-              </a:rPr>
-              <a:t>400G/800G ZR/ZR+ 直插路由器端口；Cisco 估算两个 100 MW 站点需 1.2～3.2 万个相干端口</a:t>
-            </a:r>
-            <a:endParaRPr lang="zh-CN" altLang="en-US" sz="1400" dirty="0"/>
+            <a:r>
+              <a:rPr lang="zh-CN" altLang="en-US" sz="1400" dirty="0"/>
+              <a:t>论文里通篇没有出现 </a:t>
+            </a:r>
+            <a:r>
+              <a:rPr lang="en-SG" altLang="zh-CN" sz="1400" dirty="0"/>
+              <a:t>PFC</a:t>
+            </a:r>
+            <a:r>
+              <a:rPr lang="zh-CN" altLang="en-SG" sz="1400" dirty="0"/>
+              <a:t>、</a:t>
+            </a:r>
+            <a:r>
+              <a:rPr lang="zh-CN" altLang="en-US" sz="1400" dirty="0"/>
+              <a:t>无损、深缓存这些概念。</a:t>
+            </a:r>
+            <a:r>
+              <a:rPr lang="en-SG" altLang="zh-CN" sz="1400" dirty="0"/>
+              <a:t>GGN </a:t>
+            </a:r>
+            <a:r>
+              <a:rPr lang="zh-CN" altLang="en-US" sz="1400" dirty="0"/>
+              <a:t>处理拥塞和故障靠的是：源端 </a:t>
+            </a:r>
+            <a:r>
+              <a:rPr lang="en-SG" altLang="zh-CN" sz="1400" dirty="0" err="1"/>
+              <a:t>BwE</a:t>
+            </a:r>
+            <a:r>
+              <a:rPr lang="en-SG" altLang="zh-CN" sz="1400" dirty="0"/>
+              <a:t> </a:t>
+            </a:r>
+            <a:r>
+              <a:rPr lang="zh-CN" altLang="en-US" sz="1400" dirty="0"/>
+              <a:t>限速、中央 </a:t>
+            </a:r>
+            <a:r>
+              <a:rPr lang="en-SG" altLang="zh-CN" sz="1400" dirty="0"/>
+              <a:t>TE</a:t>
+            </a:r>
+            <a:r>
+              <a:rPr lang="zh-CN" altLang="en-SG" sz="1400" dirty="0"/>
+              <a:t>、</a:t>
+            </a:r>
+            <a:r>
+              <a:rPr lang="zh-CN" altLang="en-US" sz="1400" dirty="0"/>
+              <a:t>优先级分层，再加上主机侧的 </a:t>
+            </a:r>
+            <a:r>
+              <a:rPr lang="en-SG" altLang="zh-CN" sz="1400" dirty="0"/>
+              <a:t>PRR </a:t>
+            </a:r>
+            <a:r>
+              <a:rPr lang="zh-CN" altLang="en-US" sz="1400" dirty="0"/>
+              <a:t>换路。这是一套</a:t>
+            </a:r>
+            <a:r>
+              <a:rPr lang="en-US" altLang="zh-CN" sz="1400" dirty="0"/>
+              <a:t>"</a:t>
+            </a:r>
+            <a:r>
+              <a:rPr lang="zh-CN" altLang="en-US" sz="1400" dirty="0"/>
+              <a:t>网络允许丢包，端点负责可靠性</a:t>
+            </a:r>
+            <a:r>
+              <a:rPr lang="en-US" altLang="zh-CN" sz="1400" dirty="0"/>
+              <a:t>"</a:t>
+            </a:r>
+            <a:r>
+              <a:rPr lang="zh-CN" altLang="en-US" sz="1400" dirty="0"/>
+              <a:t>的设计，和前面说的</a:t>
+            </a:r>
+            <a:r>
+              <a:rPr lang="en-US" altLang="zh-CN" sz="1400" dirty="0"/>
+              <a:t>"</a:t>
+            </a:r>
+            <a:r>
+              <a:rPr lang="zh-CN" altLang="en-US" sz="1400" dirty="0"/>
+              <a:t>无损 </a:t>
+            </a:r>
+            <a:r>
+              <a:rPr lang="en-US" altLang="zh-CN" sz="1400" dirty="0"/>
+              <a:t>+ </a:t>
+            </a:r>
+            <a:r>
+              <a:rPr lang="en-SG" altLang="zh-CN" sz="1400" dirty="0"/>
+              <a:t>PFC + </a:t>
+            </a:r>
+            <a:r>
+              <a:rPr lang="zh-CN" altLang="en-US" sz="1400" dirty="0"/>
+              <a:t>深缓存</a:t>
+            </a:r>
+            <a:r>
+              <a:rPr lang="en-US" altLang="zh-CN" sz="1400" dirty="0"/>
+              <a:t>"</a:t>
+            </a:r>
+            <a:r>
+              <a:rPr lang="zh-CN" altLang="en-US" sz="1400" dirty="0"/>
+              <a:t>路线正好相反。</a:t>
+            </a:r>
           </a:p>
         </p:txBody>
       </p:sp>
@@ -9112,22 +9176,22 @@
               </a:spcAft>
             </a:pPr>
             <a:r>
-              <a:rPr lang="en-SG" altLang="zh-CN" sz="1600" dirty="0"/>
+              <a:rPr lang="en-SG" altLang="zh-CN" sz="1600" b="1" dirty="0"/>
               <a:t>SE</a:t>
             </a:r>
             <a:r>
-              <a:rPr lang="zh-CN" altLang="en-US" sz="1600" dirty="0"/>
+              <a:rPr lang="zh-CN" altLang="en-US" sz="1600" b="1" dirty="0"/>
               <a:t> 是一个策略驱动的 </a:t>
             </a:r>
             <a:r>
-              <a:rPr lang="en-SG" altLang="zh-CN" sz="1600" dirty="0"/>
+              <a:rPr lang="en-SG" altLang="zh-CN" sz="1600" b="1" dirty="0"/>
               <a:t>SDN </a:t>
             </a:r>
             <a:r>
-              <a:rPr lang="zh-CN" altLang="en-US" sz="1600" dirty="0"/>
+              <a:rPr lang="zh-CN" altLang="en-US" sz="1600" b="1" dirty="0"/>
               <a:t>组件：</a:t>
             </a:r>
-            <a:endParaRPr lang="en-SG" altLang="zh-CN" sz="1600" dirty="0"/>
+            <a:endParaRPr lang="en-SG" altLang="zh-CN" sz="1600" b="1" dirty="0"/>
           </a:p>
           <a:p>
             <a:pPr marL="285750" indent="-285750" algn="just">
@@ -9194,30 +9258,30 @@
               </a:spcAft>
             </a:pPr>
             <a:r>
-              <a:rPr lang="en-SG" altLang="zh-CN" sz="1600" dirty="0"/>
+              <a:rPr lang="en-SG" altLang="zh-CN" sz="1600" b="1" dirty="0"/>
               <a:t>SE</a:t>
             </a:r>
             <a:r>
-              <a:rPr lang="zh-CN" altLang="en-US" sz="1600" dirty="0"/>
+              <a:rPr lang="zh-CN" altLang="en-US" sz="1600" b="1" dirty="0"/>
               <a:t> 能根据 </a:t>
             </a:r>
             <a:r>
-              <a:rPr lang="en-SG" altLang="zh-CN" sz="1600" dirty="0"/>
+              <a:rPr lang="en-SG" altLang="zh-CN" sz="1600" b="1" dirty="0"/>
               <a:t>Service Level Objective </a:t>
             </a:r>
             <a:r>
-              <a:rPr lang="zh-CN" altLang="en-US" sz="1600" dirty="0"/>
+              <a:rPr lang="zh-CN" altLang="en-US" sz="1600" b="1" dirty="0"/>
               <a:t>和业务策略做主动、精细的决策。故障发生时，</a:t>
             </a:r>
             <a:r>
-              <a:rPr lang="en-SG" altLang="zh-CN" sz="1600" dirty="0"/>
+              <a:rPr lang="en-SG" altLang="zh-CN" sz="1600" b="1" dirty="0"/>
               <a:t>GGN</a:t>
             </a:r>
             <a:r>
-              <a:rPr lang="zh-CN" altLang="en-US" sz="1600" dirty="0"/>
+              <a:rPr lang="zh-CN" altLang="en-US" sz="1600" b="1" dirty="0"/>
               <a:t>是多层递进响应：</a:t>
             </a:r>
-            <a:endParaRPr lang="en-SG" altLang="zh-CN" sz="1600" dirty="0"/>
+            <a:endParaRPr lang="en-SG" altLang="zh-CN" sz="1600" b="1" dirty="0"/>
           </a:p>
           <a:p>
             <a:pPr marL="285750" indent="-285750" algn="just">
@@ -9296,18 +9360,18 @@
               </a:spcAft>
             </a:pPr>
             <a:r>
-              <a:rPr lang="zh-CN" altLang="en-US" sz="1600" dirty="0"/>
+              <a:rPr lang="zh-CN" altLang="en-US" sz="1600" b="1" dirty="0"/>
               <a:t>流量分级 </a:t>
             </a:r>
             <a:r>
-              <a:rPr lang="en-SG" altLang="zh-CN" sz="1600" dirty="0"/>
+              <a:rPr lang="en-SG" altLang="zh-CN" sz="1600" b="1" dirty="0"/>
               <a:t>Service Level Objective</a:t>
             </a:r>
             <a:r>
-              <a:rPr lang="zh-CN" altLang="en-SG" sz="1600" dirty="0"/>
+              <a:rPr lang="zh-CN" altLang="en-SG" sz="1600" b="1" dirty="0"/>
               <a:t>：</a:t>
             </a:r>
-            <a:endParaRPr lang="en-SG" altLang="zh-CN" sz="1600" dirty="0"/>
+            <a:endParaRPr lang="en-SG" altLang="zh-CN" sz="1600" b="1" dirty="0"/>
           </a:p>
           <a:p>
             <a:pPr marL="285750" indent="-285750" algn="just">
